--- a/test-corpus/word-verification/crossing-stress-bipartite.pptx
+++ b/test-corpus/word-verification/crossing-stress-bipartite.pptx
@@ -760,15 +760,12 @@
           </a:fontRef>
         </p:style>
       </p:cxnSp>
-      <p:cxnSp>
-        <p:nvCxnSpPr>
+      <p:sp>
+        <p:nvSpPr>
           <p:cNvPr id="22" name="A1--B3"/>
-          <p:cNvCxnSpPr>
-            <a:stCxn id="12" idx="2"/>
-            <a:endCxn id="15" idx="0"/>
-          </p:cNvCxnSpPr>
-          <p:nvPr/>
-        </p:nvCxnSpPr>
+          <p:cNvSpPr/>
+          <p:nvPr/>
+        </p:nvSpPr>
         <p:spPr>
           <a:xfrm>
             <a:off x="5440866" y="1683834"/>
@@ -816,7 +813,7 @@
             <a:schemeClr val="tx1"/>
           </a:fontRef>
         </p:style>
-      </p:cxnSp>
+      </p:sp>
       <p:cxnSp>
         <p:nvCxnSpPr>
           <p:cNvPr id="23" name="A2--B1"/>
@@ -937,15 +934,12 @@
           </a:fontRef>
         </p:style>
       </p:cxnSp>
-      <p:cxnSp>
-        <p:nvCxnSpPr>
+      <p:sp>
+        <p:nvSpPr>
           <p:cNvPr id="26" name="A3--B2"/>
-          <p:cNvCxnSpPr>
-            <a:stCxn id="18" idx="0"/>
-            <a:endCxn id="14" idx="2"/>
-          </p:cNvCxnSpPr>
-          <p:nvPr/>
-        </p:nvCxnSpPr>
+          <p:cNvSpPr/>
+          <p:nvPr/>
+        </p:nvSpPr>
         <p:spPr>
           <a:xfrm>
             <a:off x="5440866" y="3452696"/>
@@ -993,7 +987,7 @@
             <a:schemeClr val="tx1"/>
           </a:fontRef>
         </p:style>
-      </p:cxnSp>
+      </p:sp>
       <p:cxnSp>
         <p:nvCxnSpPr>
           <p:cNvPr id="27" name="A3--B3"/>

--- a/test-corpus/word-verification/crossing-stress-bipartite.pptx
+++ b/test-corpus/word-verification/crossing-stress-bipartite.pptx
@@ -144,7 +144,7 @@
         </p:nvSpPr>
         <p:spPr>
           <a:xfrm>
-            <a:off x="5135137" y="1028700"/>
+            <a:off x="3013729" y="1028700"/>
             <a:ext cx="611459" cy="655134"/>
           </a:xfrm>
           <a:prstGeom prst="rect">
@@ -212,7 +212,7 @@
         </p:nvSpPr>
         <p:spPr>
           <a:xfrm>
-            <a:off x="6445405" y="1618321"/>
+            <a:off x="4323997" y="1618321"/>
             <a:ext cx="611459" cy="655134"/>
           </a:xfrm>
           <a:prstGeom prst="rect">
@@ -280,7 +280,7 @@
         </p:nvSpPr>
         <p:spPr>
           <a:xfrm>
-            <a:off x="6445405" y="2797562"/>
+            <a:off x="4323997" y="2797562"/>
             <a:ext cx="611459" cy="655134"/>
           </a:xfrm>
           <a:prstGeom prst="rect">
@@ -348,7 +348,7 @@
         </p:nvSpPr>
         <p:spPr>
           <a:xfrm>
-            <a:off x="6445405" y="3976804"/>
+            <a:off x="4323997" y="3976804"/>
             <a:ext cx="611459" cy="655134"/>
           </a:xfrm>
           <a:prstGeom prst="rect">
@@ -416,7 +416,7 @@
         </p:nvSpPr>
         <p:spPr>
           <a:xfrm>
-            <a:off x="5135137" y="2382644"/>
+            <a:off x="3013729" y="2382644"/>
             <a:ext cx="611459" cy="655134"/>
           </a:xfrm>
           <a:prstGeom prst="rect">
@@ -484,7 +484,7 @@
         </p:nvSpPr>
         <p:spPr>
           <a:xfrm>
-            <a:off x="6445405" y="5156045"/>
+            <a:off x="4323997" y="5156045"/>
             <a:ext cx="611459" cy="655134"/>
           </a:xfrm>
           <a:prstGeom prst="rect">
@@ -552,7 +552,7 @@
         </p:nvSpPr>
         <p:spPr>
           <a:xfrm>
-            <a:off x="5135137" y="5745666"/>
+            <a:off x="3013729" y="5745666"/>
             <a:ext cx="611459" cy="655134"/>
           </a:xfrm>
           <a:prstGeom prst="rect">
@@ -620,7 +620,7 @@
         </p:nvSpPr>
         <p:spPr>
           <a:xfrm>
-            <a:off x="5135137" y="4391722"/>
+            <a:off x="3013729" y="4391722"/>
             <a:ext cx="611459" cy="655134"/>
           </a:xfrm>
           <a:prstGeom prst="rect">
@@ -691,7 +691,7 @@
         </p:nvCxnSpPr>
         <p:spPr>
           <a:xfrm>
-            <a:off x="5746596" y="1356267"/>
+            <a:off x="3625188" y="1356267"/>
             <a:ext cx="698809" cy="589621"/>
           </a:xfrm>
           <a:prstGeom prst="line">
@@ -731,7 +731,7 @@
         </p:nvCxnSpPr>
         <p:spPr>
           <a:xfrm>
-            <a:off x="5440866" y="1683834"/>
+            <a:off x="3319458" y="1683834"/>
             <a:ext cx="1310269" cy="1113728"/>
           </a:xfrm>
           <a:prstGeom prst="line">
@@ -768,7 +768,7 @@
         </p:nvSpPr>
         <p:spPr>
           <a:xfrm>
-            <a:off x="5440866" y="1683834"/>
+            <a:off x="3319458" y="1683834"/>
             <a:ext cx="1310269" cy="2292970"/>
           </a:xfrm>
           <a:custGeom>
@@ -825,7 +825,7 @@
         </p:nvCxnSpPr>
         <p:spPr>
           <a:xfrm flipV="1">
-            <a:off x="5746596" y="1945888"/>
+            <a:off x="3625188" y="1945888"/>
             <a:ext cx="698809" cy="764323"/>
           </a:xfrm>
           <a:prstGeom prst="line">
@@ -865,7 +865,7 @@
         </p:nvCxnSpPr>
         <p:spPr>
           <a:xfrm>
-            <a:off x="5746596" y="2710211"/>
+            <a:off x="3625188" y="2710211"/>
             <a:ext cx="698809" cy="414918"/>
           </a:xfrm>
           <a:prstGeom prst="line">
@@ -905,7 +905,7 @@
         </p:nvCxnSpPr>
         <p:spPr>
           <a:xfrm>
-            <a:off x="5440866" y="3037778"/>
+            <a:off x="3319458" y="3037778"/>
             <a:ext cx="1310269" cy="2118267"/>
           </a:xfrm>
           <a:prstGeom prst="line">
@@ -942,7 +942,7 @@
         </p:nvSpPr>
         <p:spPr>
           <a:xfrm>
-            <a:off x="5440866" y="3452696"/>
+            <a:off x="3319458" y="3452696"/>
             <a:ext cx="1310269" cy="2292970"/>
           </a:xfrm>
           <a:custGeom>
@@ -999,7 +999,7 @@
         </p:nvCxnSpPr>
         <p:spPr>
           <a:xfrm flipV="1">
-            <a:off x="5440866" y="4631938"/>
+            <a:off x="3319458" y="4631938"/>
             <a:ext cx="1310269" cy="1113728"/>
           </a:xfrm>
           <a:prstGeom prst="line">
@@ -1039,7 +1039,7 @@
         </p:nvCxnSpPr>
         <p:spPr>
           <a:xfrm flipV="1">
-            <a:off x="5746596" y="5483612"/>
+            <a:off x="3625188" y="5483612"/>
             <a:ext cx="698809" cy="589621"/>
           </a:xfrm>
           <a:prstGeom prst="line">
@@ -1079,7 +1079,7 @@
         </p:nvCxnSpPr>
         <p:spPr>
           <a:xfrm flipV="1">
-            <a:off x="5440866" y="2273455"/>
+            <a:off x="3319458" y="2273455"/>
             <a:ext cx="1310269" cy="2118267"/>
           </a:xfrm>
           <a:prstGeom prst="line">
@@ -1119,7 +1119,7 @@
         </p:nvCxnSpPr>
         <p:spPr>
           <a:xfrm flipV="1">
-            <a:off x="5746596" y="4304371"/>
+            <a:off x="3625188" y="4304371"/>
             <a:ext cx="698809" cy="414918"/>
           </a:xfrm>
           <a:prstGeom prst="line">
@@ -1159,7 +1159,7 @@
         </p:nvCxnSpPr>
         <p:spPr>
           <a:xfrm>
-            <a:off x="5746596" y="4719289"/>
+            <a:off x="3625188" y="4719289"/>
             <a:ext cx="698809" cy="764323"/>
           </a:xfrm>
           <a:prstGeom prst="line">
@@ -1188,6 +1188,205 @@
           </a:fontRef>
         </p:style>
       </p:cxnSp>
+      <p:sp>
+        <p:nvSpPr>
+          <p:cNvPr id="4" name="Mermaid source"/>
+          <p:cNvSpPr/>
+          <p:nvPr/>
+        </p:nvSpPr>
+        <p:spPr>
+          <a:xfrm>
+            <a:off x="7674864" y="1028700"/>
+            <a:ext cx="4059936" cy="5372100"/>
+          </a:xfrm>
+          <a:prstGeom prst="rect">
+            <a:avLst/>
+          </a:prstGeom>
+          <a:solidFill>
+            <a:srgbClr val="F3F4F6"/>
+          </a:solidFill>
+          <a:ln w="9525">
+            <a:solidFill>
+              <a:srgbClr val="D1D5DB"/>
+            </a:solidFill>
+          </a:ln>
+        </p:spPr>
+        <p:txBody>
+          <a:bodyPr wrap="square" lIns="91440" tIns="45720" rIns="91440" bIns="45720" anchor="t">
+            <a:noAutofit/>
+          </a:bodyPr>
+          <a:lstStyle/>
+          <a:p>
+            <a:pPr algn="l"/>
+            <a:r>
+              <a:rPr lang="en-US" sz="1400" dirty="0">
+                <a:solidFill>
+                  <a:srgbClr val="1F2937"/>
+                </a:solidFill>
+                <a:latin typeface="Consolas"/>
+                <a:cs typeface="Consolas"/>
+              </a:rPr>
+              <a:t>flowchart LR</a:t>
+            </a:r>
+          </a:p>
+          <a:p>
+            <a:pPr algn="l"/>
+            <a:r>
+              <a:rPr lang="en-US" sz="1400" dirty="0">
+                <a:solidFill>
+                  <a:srgbClr val="1F2937"/>
+                </a:solidFill>
+                <a:latin typeface="Consolas"/>
+                <a:cs typeface="Consolas"/>
+              </a:rPr>
+              <a:t>    A1[A1] --&gt; B1[B1]</a:t>
+            </a:r>
+          </a:p>
+          <a:p>
+            <a:pPr algn="l"/>
+            <a:r>
+              <a:rPr lang="en-US" sz="1400" dirty="0">
+                <a:solidFill>
+                  <a:srgbClr val="1F2937"/>
+                </a:solidFill>
+                <a:latin typeface="Consolas"/>
+                <a:cs typeface="Consolas"/>
+              </a:rPr>
+              <a:t>    A1 --&gt; B2[B2]</a:t>
+            </a:r>
+          </a:p>
+          <a:p>
+            <a:pPr algn="l"/>
+            <a:r>
+              <a:rPr lang="en-US" sz="1400" dirty="0">
+                <a:solidFill>
+                  <a:srgbClr val="1F2937"/>
+                </a:solidFill>
+                <a:latin typeface="Consolas"/>
+                <a:cs typeface="Consolas"/>
+              </a:rPr>
+              <a:t>    A1 --&gt; B3[B3]</a:t>
+            </a:r>
+          </a:p>
+          <a:p>
+            <a:pPr algn="l"/>
+            <a:r>
+              <a:rPr lang="en-US" sz="1400" dirty="0">
+                <a:solidFill>
+                  <a:srgbClr val="1F2937"/>
+                </a:solidFill>
+                <a:latin typeface="Consolas"/>
+                <a:cs typeface="Consolas"/>
+              </a:rPr>
+              <a:t>    A2[A2] --&gt; B1</a:t>
+            </a:r>
+          </a:p>
+          <a:p>
+            <a:pPr algn="l"/>
+            <a:r>
+              <a:rPr lang="en-US" sz="1400" dirty="0">
+                <a:solidFill>
+                  <a:srgbClr val="1F2937"/>
+                </a:solidFill>
+                <a:latin typeface="Consolas"/>
+                <a:cs typeface="Consolas"/>
+              </a:rPr>
+              <a:t>    A2 --&gt; B2</a:t>
+            </a:r>
+          </a:p>
+          <a:p>
+            <a:pPr algn="l"/>
+            <a:r>
+              <a:rPr lang="en-US" sz="1400" dirty="0">
+                <a:solidFill>
+                  <a:srgbClr val="1F2937"/>
+                </a:solidFill>
+                <a:latin typeface="Consolas"/>
+                <a:cs typeface="Consolas"/>
+              </a:rPr>
+              <a:t>    A2 --&gt; B4[B4]</a:t>
+            </a:r>
+          </a:p>
+          <a:p>
+            <a:pPr algn="l"/>
+            <a:r>
+              <a:rPr lang="en-US" sz="1400" dirty="0">
+                <a:solidFill>
+                  <a:srgbClr val="1F2937"/>
+                </a:solidFill>
+                <a:latin typeface="Consolas"/>
+                <a:cs typeface="Consolas"/>
+              </a:rPr>
+              <a:t>    A3[A3] --&gt; B2</a:t>
+            </a:r>
+          </a:p>
+          <a:p>
+            <a:pPr algn="l"/>
+            <a:r>
+              <a:rPr lang="en-US" sz="1400" dirty="0">
+                <a:solidFill>
+                  <a:srgbClr val="1F2937"/>
+                </a:solidFill>
+                <a:latin typeface="Consolas"/>
+                <a:cs typeface="Consolas"/>
+              </a:rPr>
+              <a:t>    A3 --&gt; B3</a:t>
+            </a:r>
+          </a:p>
+          <a:p>
+            <a:pPr algn="l"/>
+            <a:r>
+              <a:rPr lang="en-US" sz="1400" dirty="0">
+                <a:solidFill>
+                  <a:srgbClr val="1F2937"/>
+                </a:solidFill>
+                <a:latin typeface="Consolas"/>
+                <a:cs typeface="Consolas"/>
+              </a:rPr>
+              <a:t>    A3 --&gt; B4</a:t>
+            </a:r>
+          </a:p>
+          <a:p>
+            <a:pPr algn="l"/>
+            <a:r>
+              <a:rPr lang="en-US" sz="1400" dirty="0">
+                <a:solidFill>
+                  <a:srgbClr val="1F2937"/>
+                </a:solidFill>
+                <a:latin typeface="Consolas"/>
+                <a:cs typeface="Consolas"/>
+              </a:rPr>
+              <a:t>    A4[A4] --&gt; B1</a:t>
+            </a:r>
+          </a:p>
+          <a:p>
+            <a:pPr algn="l"/>
+            <a:r>
+              <a:rPr lang="en-US" sz="1400" dirty="0">
+                <a:solidFill>
+                  <a:srgbClr val="1F2937"/>
+                </a:solidFill>
+                <a:latin typeface="Consolas"/>
+                <a:cs typeface="Consolas"/>
+              </a:rPr>
+              <a:t>    A4 --&gt; B3</a:t>
+            </a:r>
+          </a:p>
+          <a:p>
+            <a:pPr algn="l"/>
+            <a:r>
+              <a:rPr lang="en-US" sz="1400" dirty="0">
+                <a:solidFill>
+                  <a:srgbClr val="1F2937"/>
+                </a:solidFill>
+                <a:latin typeface="Consolas"/>
+                <a:cs typeface="Consolas"/>
+              </a:rPr>
+              <a:t>    A4 --&gt; B4</a:t>
+            </a:r>
+          </a:p>
+        </p:txBody>
+      </p:sp>
     </p:spTree>
   </p:cSld>
   <p:clrMapOvr>
